--- a/ppt/算法讲解206【挺难】K-D树的删除操作、树套树、优化建图.pptx
+++ b/ppt/算法讲解206【挺难】K-D树的删除操作、树套树、优化建图.pptx
@@ -5947,7 +5947,7 @@
               </a:defRPr>
             </a:pPr>
             <a:r>
-              <a:t>所有点排序，先a、再b、再c、再d，四个值一起参与排序，abcd一样的点，谁在前无所谓</a:t>
+              <a:t>根据a、b、c、d排序，得到点的序列，dp[i] = i号点结尾的情况下，四维偏序最长链的长度</a:t>
             </a:r>
           </a:p>
           <a:p>
@@ -5967,7 +5967,7 @@
               </a:defRPr>
             </a:pPr>
             <a:r>
-              <a:t>定义dp[i]，i号点结尾的情况下，四维偏序最长链的长度，每个点查询符合要求的点的最大dp值</a:t>
+              <a:t>树状数组负责b维度，K-D树负责c、d维度，dp值作为点权，K-D树维护点权最大值</a:t>
             </a:r>
           </a:p>
           <a:p>
@@ -5987,7 +5987,7 @@
               </a:defRPr>
             </a:pPr>
             <a:r>
-              <a:t>树状数组负责b维度，K-D树负责c、d维度，点的dp值作为点权，K-D树维护点权最大值</a:t>
+              <a:t>树状数组需要离散化，先根据b值再根据节点编号进行排序，这样每个点的排名不重复</a:t>
             </a:r>
           </a:p>
           <a:p>
@@ -6007,7 +6007,7 @@
               </a:defRPr>
             </a:pPr>
             <a:r>
-              <a:t>离散化b维度的数值，先b值再节点编号进行排序，排名不重复，单次复杂度O(√n)，课上证明</a:t>
+              <a:t>单次查询的复杂度不是 O( log n * √n)，而是 O(√n)，课上证明</a:t>
             </a:r>
           </a:p>
         </p:txBody>
